--- a/assets/BI_Data_Generator_Apresentacao.pptx
+++ b/assets/BI_Data_Generator_Apresentacao.pptx
@@ -3755,7 +3755,7 @@
                 </a:solidFill>
                 <a:latin typeface="Segoe UI Semibold"/>
               </a:rPr>
-              <a:t>200 SETORES  ·  10.696 MEDIDAS DAX  ·  10 FERRAMENTAS</a:t>
+              <a:t>200 SETORES  ·  10.689 MEDIDAS DAX  ·  10 FERRAMENTAS</a:t>
             </a:r>
           </a:p>
         </p:txBody>
@@ -11438,7 +11438,7 @@
                 </a:solidFill>
                 <a:latin typeface="Segoe UI Semibold"/>
               </a:rPr>
-              <a:t>10</a:t>
+              <a:t>10.689</a:t>
             </a:r>
             <a:r>
               <a:rPr sz="4600" b="1" i="0" dirty="0">
@@ -11447,7 +11447,7 @@
                 </a:solidFill>
                 <a:latin typeface="Segoe UI Semibold"/>
               </a:rPr>
-              <a:t>.</a:t>
+              <a:t/>
             </a:r>
             <a:r>
               <a:rPr lang="pt-BR" sz="4600" b="1" i="0" dirty="0">
@@ -11456,7 +11456,7 @@
                 </a:solidFill>
                 <a:latin typeface="Segoe UI Semibold"/>
               </a:rPr>
-              <a:t>696</a:t>
+              <a:t/>
             </a:r>
             <a:endParaRPr sz="4600" b="1" i="0" dirty="0">
               <a:solidFill>

--- a/assets/BI_Data_Generator_Apresentacao.pptx
+++ b/assets/BI_Data_Generator_Apresentacao.pptx
@@ -3755,7 +3755,7 @@
                 </a:solidFill>
                 <a:latin typeface="Segoe UI Semibold"/>
               </a:rPr>
-              <a:t>200 SETORES  ·  10.689 MEDIDAS DAX  ·  10 FERRAMENTAS</a:t>
+              <a:t>200 SETORES  ·  10.690 MEDIDAS DAX  ·  10 FERRAMENTAS</a:t>
             </a:r>
           </a:p>
         </p:txBody>
@@ -11438,7 +11438,7 @@
                 </a:solidFill>
                 <a:latin typeface="Segoe UI Semibold"/>
               </a:rPr>
-              <a:t>10.689</a:t>
+              <a:t>10.690</a:t>
             </a:r>
             <a:r>
               <a:rPr sz="4600" b="1" i="0" dirty="0">

--- a/assets/BI_Data_Generator_Apresentacao.pptx
+++ b/assets/BI_Data_Generator_Apresentacao.pptx
@@ -3755,7 +3755,7 @@
                 </a:solidFill>
                 <a:latin typeface="Segoe UI Semibold"/>
               </a:rPr>
-              <a:t>200 SETORES  ·  10.690 MEDIDAS DAX  ·  10 FERRAMENTAS</a:t>
+              <a:t>200 SETORES  ·  10.686 MEDIDAS DAX  ·  10 FERRAMENTAS</a:t>
             </a:r>
           </a:p>
         </p:txBody>
@@ -11438,7 +11438,7 @@
                 </a:solidFill>
                 <a:latin typeface="Segoe UI Semibold"/>
               </a:rPr>
-              <a:t>10.690</a:t>
+              <a:t>10.686</a:t>
             </a:r>
             <a:r>
               <a:rPr sz="4600" b="1" i="0" dirty="0">

--- a/assets/BI_Data_Generator_Apresentacao.pptx
+++ b/assets/BI_Data_Generator_Apresentacao.pptx
@@ -3755,7 +3755,7 @@
                 </a:solidFill>
                 <a:latin typeface="Segoe UI Semibold"/>
               </a:rPr>
-              <a:t>200 SETORES  ·  10.686 MEDIDAS DAX  ·  10 FERRAMENTAS</a:t>
+              <a:t>200 SETORES  ·  10.689 MEDIDAS DAX  ·  10 FERRAMENTAS</a:t>
             </a:r>
           </a:p>
         </p:txBody>
@@ -11438,7 +11438,7 @@
                 </a:solidFill>
                 <a:latin typeface="Segoe UI Semibold"/>
               </a:rPr>
-              <a:t>10.686</a:t>
+              <a:t>10.689</a:t>
             </a:r>
             <a:r>
               <a:rPr sz="4600" b="1" i="0" dirty="0">

--- a/assets/BI_Data_Generator_Apresentacao.pptx
+++ b/assets/BI_Data_Generator_Apresentacao.pptx
@@ -3755,7 +3755,7 @@
                 </a:solidFill>
                 <a:latin typeface="Segoe UI Semibold"/>
               </a:rPr>
-              <a:t>200 SETORES  ·  10.689 MEDIDAS DAX  ·  10 FERRAMENTAS</a:t>
+              <a:t>200 SETORES  ·  10.686 MEDIDAS DAX  ·  10 FERRAMENTAS</a:t>
             </a:r>
           </a:p>
         </p:txBody>
@@ -11438,7 +11438,7 @@
                 </a:solidFill>
                 <a:latin typeface="Segoe UI Semibold"/>
               </a:rPr>
-              <a:t>10.689</a:t>
+              <a:t>10.686</a:t>
             </a:r>
             <a:r>
               <a:rPr sz="4600" b="1" i="0" dirty="0">

--- a/assets/BI_Data_Generator_Apresentacao.pptx
+++ b/assets/BI_Data_Generator_Apresentacao.pptx
@@ -3755,7 +3755,7 @@
                 </a:solidFill>
                 <a:latin typeface="Segoe UI Semibold"/>
               </a:rPr>
-              <a:t>200 SETORES  ·  10.686 MEDIDAS DAX  ·  10 FERRAMENTAS</a:t>
+              <a:t>200 SETORES  ·  10.688 MEDIDAS DAX  ·  11 FERRAMENTAS</a:t>
             </a:r>
           </a:p>
         </p:txBody>
@@ -11438,7 +11438,7 @@
                 </a:solidFill>
                 <a:latin typeface="Segoe UI Semibold"/>
               </a:rPr>
-              <a:t>10.686</a:t>
+              <a:t>10.688</a:t>
             </a:r>
             <a:r>
               <a:rPr sz="4600" b="1" i="0" dirty="0">
@@ -11610,7 +11610,7 @@
                 </a:solidFill>
                 <a:latin typeface="Segoe UI Semibold"/>
               </a:rPr>
-              <a:t>10</a:t>
+              <a:t>11</a:t>
             </a:r>
           </a:p>
         </p:txBody>

--- a/assets/BI_Data_Generator_Apresentacao.pptx
+++ b/assets/BI_Data_Generator_Apresentacao.pptx
@@ -3755,7 +3755,7 @@
                 </a:solidFill>
                 <a:latin typeface="Segoe UI Semibold"/>
               </a:rPr>
-              <a:t>200 SETORES  ·  10.688 MEDIDAS DAX  ·  11 FERRAMENTAS</a:t>
+              <a:t>200 SETORES  ·  10.687 MEDIDAS DAX  ·  11 FERRAMENTAS</a:t>
             </a:r>
           </a:p>
         </p:txBody>
@@ -11438,7 +11438,7 @@
                 </a:solidFill>
                 <a:latin typeface="Segoe UI Semibold"/>
               </a:rPr>
-              <a:t>10.688</a:t>
+              <a:t>10.687</a:t>
             </a:r>
             <a:r>
               <a:rPr sz="4600" b="1" i="0" dirty="0">

--- a/assets/BI_Data_Generator_Apresentacao.pptx
+++ b/assets/BI_Data_Generator_Apresentacao.pptx
@@ -11832,7 +11832,7 @@
                 </a:solidFill>
                 <a:latin typeface="Segoe UI Semibold"/>
               </a:rPr>
-              <a:t>UM APP, DEZ FERRAMENTAS</a:t>
+              <a:t>UM APP, ONZE FERRAMENTAS</a:t>
             </a:r>
           </a:p>
         </p:txBody>
@@ -11885,7 +11885,7 @@
         <p:spPr>
           <a:xfrm>
             <a:off x="685800" y="2011680"/>
-            <a:ext cx="2057400" cy="1691640"/>
+            <a:ext cx="1691640" cy="2011680"/>
           </a:xfrm>
           <a:prstGeom prst="roundRect">
             <a:avLst>
@@ -11931,8 +11931,8 @@
         </p:nvSpPr>
         <p:spPr>
           <a:xfrm>
-            <a:off x="886968" y="2212848"/>
-            <a:ext cx="310896" cy="45720"/>
+            <a:off x="868680" y="2194560"/>
+            <a:ext cx="292608" cy="45720"/>
           </a:xfrm>
           <a:prstGeom prst="rect">
             <a:avLst/>
@@ -11976,8 +11976,8 @@
         </p:nvSpPr>
         <p:spPr>
           <a:xfrm>
-            <a:off x="886968" y="2377440"/>
-            <a:ext cx="1655064" cy="228600"/>
+            <a:off x="868680" y="2340864"/>
+            <a:ext cx="1325880" cy="228600"/>
           </a:xfrm>
           <a:prstGeom prst="rect">
             <a:avLst/>
@@ -12011,8 +12011,8 @@
         </p:nvSpPr>
         <p:spPr>
           <a:xfrm>
-            <a:off x="886968" y="2633472"/>
-            <a:ext cx="1655064" cy="457200"/>
+            <a:off x="868680" y="2578608"/>
+            <a:ext cx="1325880" cy="777240"/>
           </a:xfrm>
           <a:prstGeom prst="rect">
             <a:avLst/>
@@ -12031,7 +12031,7 @@
               </a:lnSpc>
             </a:pPr>
             <a:r>
-              <a:rPr sz="1300" b="1" i="0">
+              <a:rPr sz="1200" b="1" i="0">
                 <a:solidFill>
                   <a:srgbClr val="F3F2F1"/>
                 </a:solidFill>
@@ -12050,8 +12050,8 @@
         </p:nvSpPr>
         <p:spPr>
           <a:xfrm>
-            <a:off x="886968" y="3017520"/>
-            <a:ext cx="1655064" cy="548640"/>
+            <a:off x="868680" y="3383280"/>
+            <a:ext cx="1325880" cy="594360"/>
           </a:xfrm>
           <a:prstGeom prst="rect">
             <a:avLst/>
@@ -12070,7 +12070,7 @@
               </a:lnSpc>
             </a:pPr>
             <a:r>
-              <a:rPr sz="950" b="0" i="0">
+              <a:rPr sz="900" b="0" i="0">
                 <a:solidFill>
                   <a:srgbClr val="B3B0AD"/>
                 </a:solidFill>
@@ -12089,8 +12089,8 @@
         </p:nvSpPr>
         <p:spPr>
           <a:xfrm>
-            <a:off x="2880360" y="2011680"/>
-            <a:ext cx="2057400" cy="1691640"/>
+            <a:off x="2514600" y="2011680"/>
+            <a:ext cx="1691640" cy="2011680"/>
           </a:xfrm>
           <a:prstGeom prst="roundRect">
             <a:avLst>
@@ -12136,8 +12136,8 @@
         </p:nvSpPr>
         <p:spPr>
           <a:xfrm>
-            <a:off x="3081528" y="2212848"/>
-            <a:ext cx="310896" cy="45720"/>
+            <a:off x="2697480" y="2194560"/>
+            <a:ext cx="292608" cy="45720"/>
           </a:xfrm>
           <a:prstGeom prst="rect">
             <a:avLst/>
@@ -12181,8 +12181,8 @@
         </p:nvSpPr>
         <p:spPr>
           <a:xfrm>
-            <a:off x="3081528" y="2377440"/>
-            <a:ext cx="1655064" cy="228600"/>
+            <a:off x="2697480" y="2340864"/>
+            <a:ext cx="1325880" cy="228600"/>
           </a:xfrm>
           <a:prstGeom prst="rect">
             <a:avLst/>
@@ -12216,8 +12216,8 @@
         </p:nvSpPr>
         <p:spPr>
           <a:xfrm>
-            <a:off x="3081528" y="2633472"/>
-            <a:ext cx="1655064" cy="457200"/>
+            <a:off x="2697480" y="2578608"/>
+            <a:ext cx="1325880" cy="777240"/>
           </a:xfrm>
           <a:prstGeom prst="rect">
             <a:avLst/>
@@ -12236,7 +12236,7 @@
               </a:lnSpc>
             </a:pPr>
             <a:r>
-              <a:rPr sz="1300" b="1" i="0">
+              <a:rPr sz="1200" b="1" i="0">
                 <a:solidFill>
                   <a:srgbClr val="F3F2F1"/>
                 </a:solidFill>
@@ -12255,8 +12255,8 @@
         </p:nvSpPr>
         <p:spPr>
           <a:xfrm>
-            <a:off x="3081528" y="3017520"/>
-            <a:ext cx="1655064" cy="548640"/>
+            <a:off x="2697480" y="3383280"/>
+            <a:ext cx="1325880" cy="594360"/>
           </a:xfrm>
           <a:prstGeom prst="rect">
             <a:avLst/>
@@ -12275,7 +12275,7 @@
               </a:lnSpc>
             </a:pPr>
             <a:r>
-              <a:rPr sz="950" b="0" i="0">
+              <a:rPr sz="900" b="0" i="0">
                 <a:solidFill>
                   <a:srgbClr val="B3B0AD"/>
                 </a:solidFill>
@@ -12294,8 +12294,8 @@
         </p:nvSpPr>
         <p:spPr>
           <a:xfrm>
-            <a:off x="5074920" y="2011680"/>
-            <a:ext cx="2057400" cy="1691640"/>
+            <a:off x="4343400" y="2011680"/>
+            <a:ext cx="1691640" cy="2011680"/>
           </a:xfrm>
           <a:prstGeom prst="roundRect">
             <a:avLst>
@@ -12341,8 +12341,8 @@
         </p:nvSpPr>
         <p:spPr>
           <a:xfrm>
-            <a:off x="5276088" y="2212848"/>
-            <a:ext cx="310896" cy="45720"/>
+            <a:off x="4526280" y="2194560"/>
+            <a:ext cx="292608" cy="45720"/>
           </a:xfrm>
           <a:prstGeom prst="rect">
             <a:avLst/>
@@ -12386,8 +12386,8 @@
         </p:nvSpPr>
         <p:spPr>
           <a:xfrm>
-            <a:off x="5276088" y="2377440"/>
-            <a:ext cx="1655064" cy="228600"/>
+            <a:off x="4526280" y="2340864"/>
+            <a:ext cx="1325880" cy="228600"/>
           </a:xfrm>
           <a:prstGeom prst="rect">
             <a:avLst/>
@@ -12421,8 +12421,8 @@
         </p:nvSpPr>
         <p:spPr>
           <a:xfrm>
-            <a:off x="5276088" y="2633472"/>
-            <a:ext cx="1655064" cy="457200"/>
+            <a:off x="4526280" y="2578608"/>
+            <a:ext cx="1325880" cy="777240"/>
           </a:xfrm>
           <a:prstGeom prst="rect">
             <a:avLst/>
@@ -12441,7 +12441,7 @@
               </a:lnSpc>
             </a:pPr>
             <a:r>
-              <a:rPr sz="1300" b="1" i="0">
+              <a:rPr sz="1200" b="1" i="0">
                 <a:solidFill>
                   <a:srgbClr val="F3F2F1"/>
                 </a:solidFill>
@@ -12460,8 +12460,8 @@
         </p:nvSpPr>
         <p:spPr>
           <a:xfrm>
-            <a:off x="5276088" y="3017520"/>
-            <a:ext cx="1655064" cy="548640"/>
+            <a:off x="4526280" y="3383280"/>
+            <a:ext cx="1325880" cy="594360"/>
           </a:xfrm>
           <a:prstGeom prst="rect">
             <a:avLst/>
@@ -12480,7 +12480,7 @@
               </a:lnSpc>
             </a:pPr>
             <a:r>
-              <a:rPr sz="950" b="0" i="0">
+              <a:rPr sz="900" b="0" i="0">
                 <a:solidFill>
                   <a:srgbClr val="B3B0AD"/>
                 </a:solidFill>
@@ -12499,8 +12499,8 @@
         </p:nvSpPr>
         <p:spPr>
           <a:xfrm>
-            <a:off x="7269479" y="2011680"/>
-            <a:ext cx="2057400" cy="1691640"/>
+            <a:off x="6172200" y="2011680"/>
+            <a:ext cx="1691640" cy="2011680"/>
           </a:xfrm>
           <a:prstGeom prst="roundRect">
             <a:avLst>
@@ -12546,8 +12546,8 @@
         </p:nvSpPr>
         <p:spPr>
           <a:xfrm>
-            <a:off x="7470648" y="2212848"/>
-            <a:ext cx="310896" cy="45720"/>
+            <a:off x="6355080" y="2194560"/>
+            <a:ext cx="292608" cy="45720"/>
           </a:xfrm>
           <a:prstGeom prst="rect">
             <a:avLst/>
@@ -12591,8 +12591,8 @@
         </p:nvSpPr>
         <p:spPr>
           <a:xfrm>
-            <a:off x="7470648" y="2377440"/>
-            <a:ext cx="1655064" cy="228600"/>
+            <a:off x="6355080" y="2340864"/>
+            <a:ext cx="1325880" cy="228600"/>
           </a:xfrm>
           <a:prstGeom prst="rect">
             <a:avLst/>
@@ -12626,8 +12626,8 @@
         </p:nvSpPr>
         <p:spPr>
           <a:xfrm>
-            <a:off x="7470648" y="2633472"/>
-            <a:ext cx="1655064" cy="457200"/>
+            <a:off x="6355080" y="2578608"/>
+            <a:ext cx="1325880" cy="777240"/>
           </a:xfrm>
           <a:prstGeom prst="rect">
             <a:avLst/>
@@ -12646,7 +12646,7 @@
               </a:lnSpc>
             </a:pPr>
             <a:r>
-              <a:rPr sz="1300" b="1" i="0">
+              <a:rPr sz="1200" b="1" i="0">
                 <a:solidFill>
                   <a:srgbClr val="F3F2F1"/>
                 </a:solidFill>
@@ -12665,8 +12665,8 @@
         </p:nvSpPr>
         <p:spPr>
           <a:xfrm>
-            <a:off x="7470648" y="3017520"/>
-            <a:ext cx="1655064" cy="548640"/>
+            <a:off x="6355080" y="3383280"/>
+            <a:ext cx="1325880" cy="594360"/>
           </a:xfrm>
           <a:prstGeom prst="rect">
             <a:avLst/>
@@ -12685,7 +12685,7 @@
               </a:lnSpc>
             </a:pPr>
             <a:r>
-              <a:rPr sz="950" b="0" i="0">
+              <a:rPr sz="900" b="0" i="0">
                 <a:solidFill>
                   <a:srgbClr val="B3B0AD"/>
                 </a:solidFill>
@@ -12704,8 +12704,8 @@
         </p:nvSpPr>
         <p:spPr>
           <a:xfrm>
-            <a:off x="9464040" y="2011680"/>
-            <a:ext cx="2057400" cy="1691640"/>
+            <a:off x="8001000" y="2011680"/>
+            <a:ext cx="1691640" cy="2011680"/>
           </a:xfrm>
           <a:prstGeom prst="roundRect">
             <a:avLst>
@@ -12751,8 +12751,8 @@
         </p:nvSpPr>
         <p:spPr>
           <a:xfrm>
-            <a:off x="9665208" y="2212848"/>
-            <a:ext cx="310896" cy="45720"/>
+            <a:off x="8183879" y="2194560"/>
+            <a:ext cx="292608" cy="45720"/>
           </a:xfrm>
           <a:prstGeom prst="rect">
             <a:avLst/>
@@ -12796,8 +12796,8 @@
         </p:nvSpPr>
         <p:spPr>
           <a:xfrm>
-            <a:off x="9665208" y="2377440"/>
-            <a:ext cx="1655064" cy="228600"/>
+            <a:off x="8183879" y="2340864"/>
+            <a:ext cx="1325880" cy="228600"/>
           </a:xfrm>
           <a:prstGeom prst="rect">
             <a:avLst/>
@@ -12831,8 +12831,8 @@
         </p:nvSpPr>
         <p:spPr>
           <a:xfrm>
-            <a:off x="9665208" y="2633472"/>
-            <a:ext cx="1655064" cy="457200"/>
+            <a:off x="8183879" y="2578608"/>
+            <a:ext cx="1325880" cy="777240"/>
           </a:xfrm>
           <a:prstGeom prst="rect">
             <a:avLst/>
@@ -12851,13 +12851,13 @@
               </a:lnSpc>
             </a:pPr>
             <a:r>
-              <a:rPr sz="1300" b="1" i="0">
+              <a:rPr sz="1200" b="1" i="0">
                 <a:solidFill>
                   <a:srgbClr val="F3F2F1"/>
                 </a:solidFill>
                 <a:latin typeface="Segoe UI Semibold"/>
               </a:rPr>
-              <a:t>Formatar DAX</a:t>
+              <a:t>Dimensões Mutáveis</a:t>
             </a:r>
           </a:p>
         </p:txBody>
@@ -12870,8 +12870,8 @@
         </p:nvSpPr>
         <p:spPr>
           <a:xfrm>
-            <a:off x="9665208" y="3017520"/>
-            <a:ext cx="1655064" cy="548640"/>
+            <a:off x="8183879" y="3383280"/>
+            <a:ext cx="1325880" cy="594360"/>
           </a:xfrm>
           <a:prstGeom prst="rect">
             <a:avLst/>
@@ -12890,13 +12890,13 @@
               </a:lnSpc>
             </a:pPr>
             <a:r>
-              <a:rPr sz="950" b="0" i="0">
+              <a:rPr sz="900" b="0" i="0">
                 <a:solidFill>
                   <a:srgbClr val="B3B0AD"/>
                 </a:solidFill>
                 <a:latin typeface="Segoe UI"/>
               </a:rPr>
-              <a:t>Expressao bagunçada vira codigo legivel</a:t>
+              <a:t>Simula SCD com gabarito verificavel</a:t>
             </a:r>
           </a:p>
         </p:txBody>
@@ -12909,8 +12909,8 @@
         </p:nvSpPr>
         <p:spPr>
           <a:xfrm>
-            <a:off x="685800" y="3867912"/>
-            <a:ext cx="2057400" cy="1691640"/>
+            <a:off x="9829800" y="2011680"/>
+            <a:ext cx="1691640" cy="2011680"/>
           </a:xfrm>
           <a:prstGeom prst="roundRect">
             <a:avLst>
@@ -12956,8 +12956,8 @@
         </p:nvSpPr>
         <p:spPr>
           <a:xfrm>
-            <a:off x="886968" y="4069080"/>
-            <a:ext cx="310896" cy="45720"/>
+            <a:off x="10012680" y="2194560"/>
+            <a:ext cx="292608" cy="45720"/>
           </a:xfrm>
           <a:prstGeom prst="rect">
             <a:avLst/>
@@ -13001,8 +13001,8 @@
         </p:nvSpPr>
         <p:spPr>
           <a:xfrm>
-            <a:off x="886968" y="4233672"/>
-            <a:ext cx="1655064" cy="228600"/>
+            <a:off x="10012680" y="2340864"/>
+            <a:ext cx="1325880" cy="228600"/>
           </a:xfrm>
           <a:prstGeom prst="rect">
             <a:avLst/>
@@ -13036,8 +13036,8 @@
         </p:nvSpPr>
         <p:spPr>
           <a:xfrm>
-            <a:off x="886968" y="4489704"/>
-            <a:ext cx="1655064" cy="457200"/>
+            <a:off x="10012680" y="2578608"/>
+            <a:ext cx="1325880" cy="777240"/>
           </a:xfrm>
           <a:prstGeom prst="rect">
             <a:avLst/>
@@ -13056,13 +13056,13 @@
               </a:lnSpc>
             </a:pPr>
             <a:r>
-              <a:rPr sz="1300" b="1" i="0">
+              <a:rPr sz="1200" b="1" i="0">
                 <a:solidFill>
                   <a:srgbClr val="F3F2F1"/>
                 </a:solidFill>
                 <a:latin typeface="Segoe UI Semibold"/>
               </a:rPr>
-              <a:t>Formatar M</a:t>
+              <a:t>Formatar DAX</a:t>
             </a:r>
           </a:p>
         </p:txBody>
@@ -13075,8 +13075,8 @@
         </p:nvSpPr>
         <p:spPr>
           <a:xfrm>
-            <a:off x="886968" y="4873752"/>
-            <a:ext cx="1655064" cy="548640"/>
+            <a:off x="10012680" y="3383280"/>
+            <a:ext cx="1325880" cy="594360"/>
           </a:xfrm>
           <a:prstGeom prst="rect">
             <a:avLst/>
@@ -13095,13 +13095,13 @@
               </a:lnSpc>
             </a:pPr>
             <a:r>
-              <a:rPr sz="950" b="0" i="0">
+              <a:rPr sz="900" b="0" i="0">
                 <a:solidFill>
                   <a:srgbClr val="B3B0AD"/>
                 </a:solidFill>
                 <a:latin typeface="Segoe UI"/>
               </a:rPr>
-              <a:t>Mesmo principio, pro Power Query</a:t>
+              <a:t>Expressao bagunçada vira codigo legivel</a:t>
             </a:r>
           </a:p>
         </p:txBody>
@@ -13114,8 +13114,8 @@
         </p:nvSpPr>
         <p:spPr>
           <a:xfrm>
-            <a:off x="2880360" y="3867912"/>
-            <a:ext cx="2057400" cy="1691640"/>
+            <a:off x="685800" y="4206240"/>
+            <a:ext cx="1691640" cy="2011680"/>
           </a:xfrm>
           <a:prstGeom prst="roundRect">
             <a:avLst>
@@ -13161,8 +13161,8 @@
         </p:nvSpPr>
         <p:spPr>
           <a:xfrm>
-            <a:off x="3081528" y="4069080"/>
-            <a:ext cx="310896" cy="45720"/>
+            <a:off x="868680" y="4389120"/>
+            <a:ext cx="292608" cy="45720"/>
           </a:xfrm>
           <a:prstGeom prst="rect">
             <a:avLst/>
@@ -13206,8 +13206,8 @@
         </p:nvSpPr>
         <p:spPr>
           <a:xfrm>
-            <a:off x="3081528" y="4233672"/>
-            <a:ext cx="1655064" cy="228600"/>
+            <a:off x="868680" y="4535424"/>
+            <a:ext cx="1325880" cy="228600"/>
           </a:xfrm>
           <a:prstGeom prst="rect">
             <a:avLst/>
@@ -13241,8 +13241,8 @@
         </p:nvSpPr>
         <p:spPr>
           <a:xfrm>
-            <a:off x="3081528" y="4489704"/>
-            <a:ext cx="1655064" cy="457200"/>
+            <a:off x="868680" y="4773168"/>
+            <a:ext cx="1325880" cy="777240"/>
           </a:xfrm>
           <a:prstGeom prst="rect">
             <a:avLst/>
@@ -13261,13 +13261,13 @@
               </a:lnSpc>
             </a:pPr>
             <a:r>
-              <a:rPr sz="1300" b="1" i="0">
+              <a:rPr sz="1200" b="1" i="0">
                 <a:solidFill>
                   <a:srgbClr val="F3F2F1"/>
                 </a:solidFill>
                 <a:latin typeface="Segoe UI Semibold"/>
               </a:rPr>
-              <a:t>Auditor de Modelo</a:t>
+              <a:t>Formatar M</a:t>
             </a:r>
           </a:p>
         </p:txBody>
@@ -13280,8 +13280,8 @@
         </p:nvSpPr>
         <p:spPr>
           <a:xfrm>
-            <a:off x="3081528" y="4873752"/>
-            <a:ext cx="1655064" cy="548640"/>
+            <a:off x="868680" y="5577840"/>
+            <a:ext cx="1325880" cy="594360"/>
           </a:xfrm>
           <a:prstGeom prst="rect">
             <a:avLst/>
@@ -13300,13 +13300,13 @@
               </a:lnSpc>
             </a:pPr>
             <a:r>
-              <a:rPr sz="950" b="0" i="0">
+              <a:rPr sz="900" b="0" i="0">
                 <a:solidFill>
                   <a:srgbClr val="B3B0AD"/>
                 </a:solidFill>
                 <a:latin typeface="Segoe UI"/>
               </a:rPr>
-              <a:t>Nota de qualidade pro seu TMDL real</a:t>
+              <a:t>Mesmo principio, pro Power Query</a:t>
             </a:r>
           </a:p>
         </p:txBody>
@@ -13319,8 +13319,8 @@
         </p:nvSpPr>
         <p:spPr>
           <a:xfrm>
-            <a:off x="5074920" y="3867912"/>
-            <a:ext cx="2057400" cy="1691640"/>
+            <a:off x="2514600" y="4206240"/>
+            <a:ext cx="1691640" cy="2011680"/>
           </a:xfrm>
           <a:prstGeom prst="roundRect">
             <a:avLst>
@@ -13366,8 +13366,8 @@
         </p:nvSpPr>
         <p:spPr>
           <a:xfrm>
-            <a:off x="5276088" y="4069080"/>
-            <a:ext cx="310896" cy="45720"/>
+            <a:off x="2697480" y="4389120"/>
+            <a:ext cx="292608" cy="45720"/>
           </a:xfrm>
           <a:prstGeom prst="rect">
             <a:avLst/>
@@ -13411,8 +13411,8 @@
         </p:nvSpPr>
         <p:spPr>
           <a:xfrm>
-            <a:off x="5276088" y="4233672"/>
-            <a:ext cx="1655064" cy="228600"/>
+            <a:off x="2697480" y="4535424"/>
+            <a:ext cx="1325880" cy="228600"/>
           </a:xfrm>
           <a:prstGeom prst="rect">
             <a:avLst/>
@@ -13446,8 +13446,8 @@
         </p:nvSpPr>
         <p:spPr>
           <a:xfrm>
-            <a:off x="5276088" y="4489704"/>
-            <a:ext cx="1655064" cy="457200"/>
+            <a:off x="2697480" y="4773168"/>
+            <a:ext cx="1325880" cy="777240"/>
           </a:xfrm>
           <a:prstGeom prst="rect">
             <a:avLst/>
@@ -13466,13 +13466,13 @@
               </a:lnSpc>
             </a:pPr>
             <a:r>
-              <a:rPr sz="1300" b="1" i="0">
+              <a:rPr sz="1200" b="1" i="0">
                 <a:solidFill>
                   <a:srgbClr val="F3F2F1"/>
                 </a:solidFill>
                 <a:latin typeface="Segoe UI Semibold"/>
               </a:rPr>
-              <a:t>DAX Sandbox</a:t>
+              <a:t>Auditor de Modelo</a:t>
             </a:r>
           </a:p>
         </p:txBody>
@@ -13485,8 +13485,8 @@
         </p:nvSpPr>
         <p:spPr>
           <a:xfrm>
-            <a:off x="5276088" y="4873752"/>
-            <a:ext cx="1655064" cy="548640"/>
+            <a:off x="2697480" y="5577840"/>
+            <a:ext cx="1325880" cy="594360"/>
           </a:xfrm>
           <a:prstGeom prst="rect">
             <a:avLst/>
@@ -13505,13 +13505,13 @@
               </a:lnSpc>
             </a:pPr>
             <a:r>
-              <a:rPr sz="950" b="0" i="0">
+              <a:rPr sz="900" b="0" i="0">
                 <a:solidFill>
                   <a:srgbClr val="B3B0AD"/>
                 </a:solidFill>
                 <a:latin typeface="Segoe UI"/>
               </a:rPr>
-              <a:t>Medida DAX calculada de verdade</a:t>
+              <a:t>Nota de qualidade pro seu TMDL real</a:t>
             </a:r>
           </a:p>
         </p:txBody>
@@ -13639,8 +13639,8 @@
         </p:nvSpPr>
         <p:spPr>
           <a:xfrm>
-            <a:off x="7269479" y="3867912"/>
-            <a:ext cx="2057400" cy="1691640"/>
+            <a:off x="4343400" y="4206240"/>
+            <a:ext cx="1691640" cy="2011680"/>
           </a:xfrm>
           <a:prstGeom prst="roundRect">
             <a:avLst>
@@ -13686,8 +13686,8 @@
         </p:nvSpPr>
         <p:spPr>
           <a:xfrm>
-            <a:off x="7470648" y="4069080"/>
-            <a:ext cx="310896" cy="45720"/>
+            <a:off x="4526280" y="4389120"/>
+            <a:ext cx="292608" cy="45720"/>
           </a:xfrm>
           <a:prstGeom prst="rect">
             <a:avLst/>
@@ -13731,8 +13731,8 @@
         </p:nvSpPr>
         <p:spPr>
           <a:xfrm>
-            <a:off x="7470648" y="4233672"/>
-            <a:ext cx="1655064" cy="228600"/>
+            <a:off x="4526280" y="4535424"/>
+            <a:ext cx="1325880" cy="228600"/>
           </a:xfrm>
           <a:prstGeom prst="rect">
             <a:avLst/>
@@ -13766,8 +13766,8 @@
         </p:nvSpPr>
         <p:spPr>
           <a:xfrm>
-            <a:off x="7470648" y="4489704"/>
-            <a:ext cx="1655064" cy="457200"/>
+            <a:off x="4526280" y="4773168"/>
+            <a:ext cx="1325880" cy="777240"/>
           </a:xfrm>
           <a:prstGeom prst="rect">
             <a:avLst/>
@@ -13786,13 +13786,13 @@
               </a:lnSpc>
             </a:pPr>
             <a:r>
-              <a:rPr sz="1300" b="1" i="0">
+              <a:rPr sz="1200" b="1" i="0">
                 <a:solidFill>
                   <a:srgbClr val="F3F2F1"/>
                 </a:solidFill>
                 <a:latin typeface="Segoe UI Semibold"/>
               </a:rPr>
-              <a:t>Pergunte aos Dados</a:t>
+              <a:t>DAX Sandbox</a:t>
             </a:r>
           </a:p>
         </p:txBody>
@@ -13805,8 +13805,8 @@
         </p:nvSpPr>
         <p:spPr>
           <a:xfrm>
-            <a:off x="7470648" y="4873752"/>
-            <a:ext cx="1655064" cy="548640"/>
+            <a:off x="4526280" y="5577840"/>
+            <a:ext cx="1325880" cy="594360"/>
           </a:xfrm>
           <a:prstGeom prst="rect">
             <a:avLst/>
@@ -13825,13 +13825,13 @@
               </a:lnSpc>
             </a:pPr>
             <a:r>
-              <a:rPr sz="950" b="0" i="0">
+              <a:rPr sz="900" b="0" i="0">
                 <a:solidFill>
                   <a:srgbClr val="B3B0AD"/>
                 </a:solidFill>
                 <a:latin typeface="Segoe UI"/>
               </a:rPr>
-              <a:t>Pergunta em português vira medida DAX</a:t>
+              <a:t>Medida DAX calculada de verdade</a:t>
             </a:r>
           </a:p>
         </p:txBody>
@@ -13844,8 +13844,8 @@
         </p:nvSpPr>
         <p:spPr>
           <a:xfrm>
-            <a:off x="9464040" y="3867912"/>
-            <a:ext cx="2057400" cy="1691640"/>
+            <a:off x="6172200" y="4206240"/>
+            <a:ext cx="1691640" cy="2011680"/>
           </a:xfrm>
           <a:prstGeom prst="roundRect">
             <a:avLst>
@@ -13891,8 +13891,8 @@
         </p:nvSpPr>
         <p:spPr>
           <a:xfrm>
-            <a:off x="9665208" y="4069080"/>
-            <a:ext cx="310896" cy="45720"/>
+            <a:off x="6355080" y="4389120"/>
+            <a:ext cx="292608" cy="45720"/>
           </a:xfrm>
           <a:prstGeom prst="rect">
             <a:avLst/>
@@ -13936,8 +13936,8 @@
         </p:nvSpPr>
         <p:spPr>
           <a:xfrm>
-            <a:off x="9665208" y="4233672"/>
-            <a:ext cx="1655064" cy="228600"/>
+            <a:off x="6355080" y="4535424"/>
+            <a:ext cx="1325880" cy="228600"/>
           </a:xfrm>
           <a:prstGeom prst="rect">
             <a:avLst/>
@@ -13971,8 +13971,8 @@
         </p:nvSpPr>
         <p:spPr>
           <a:xfrm>
-            <a:off x="9665208" y="4489704"/>
-            <a:ext cx="1655064" cy="457200"/>
+            <a:off x="6355080" y="4773168"/>
+            <a:ext cx="1325880" cy="777240"/>
           </a:xfrm>
           <a:prstGeom prst="rect">
             <a:avLst/>
@@ -13991,13 +13991,13 @@
               </a:lnSpc>
             </a:pPr>
             <a:r>
-              <a:rPr sz="1300" b="1" i="0">
+              <a:rPr sz="1200" b="1" i="0">
                 <a:solidFill>
                   <a:srgbClr val="F3F2F1"/>
                 </a:solidFill>
                 <a:latin typeface="Segoe UI Semibold"/>
               </a:rPr>
-              <a:t>Carrossel Power BI</a:t>
+              <a:t>Pergunte aos Dados</a:t>
             </a:r>
           </a:p>
         </p:txBody>
@@ -14010,8 +14010,8 @@
         </p:nvSpPr>
         <p:spPr>
           <a:xfrm>
-            <a:off x="9665208" y="4873752"/>
-            <a:ext cx="1655064" cy="548640"/>
+            <a:off x="6355080" y="5577840"/>
+            <a:ext cx="1325880" cy="594360"/>
           </a:xfrm>
           <a:prstGeom prst="rect">
             <a:avLst/>
@@ -14030,7 +14030,212 @@
               </a:lnSpc>
             </a:pPr>
             <a:r>
-              <a:rPr sz="950" b="0" i="0">
+              <a:rPr sz="900" b="0" i="0">
+                <a:solidFill>
+                  <a:srgbClr val="B3B0AD"/>
+                </a:solidFill>
+                <a:latin typeface="Segoe UI"/>
+              </a:rPr>
+              <a:t>Pergunta em português vira medida DAX</a:t>
+            </a:r>
+          </a:p>
+        </p:txBody>
+      </p:sp>
+      <p:sp>
+        <p:nvSpPr>
+          <p:cNvPr id="39" name="Rounded Rectangle 38"/>
+          <p:cNvSpPr/>
+          <p:nvPr/>
+        </p:nvSpPr>
+        <p:spPr>
+          <a:xfrm>
+            <a:off x="8001000" y="4206240"/>
+            <a:ext cx="1691640" cy="2011680"/>
+          </a:xfrm>
+          <a:prstGeom prst="roundRect">
+            <a:avLst>
+              <a:gd name="adj" fmla="val 6000"/>
+            </a:avLst>
+          </a:prstGeom>
+          <a:solidFill>
+            <a:srgbClr val="1B1B1B"/>
+          </a:solidFill>
+          <a:ln>
+            <a:noFill/>
+          </a:ln>
+          <a:effectLst/>
+        </p:spPr>
+        <p:style>
+          <a:lnRef idx="1">
+            <a:schemeClr val="accent1"/>
+          </a:lnRef>
+          <a:fillRef idx="3">
+            <a:schemeClr val="accent1"/>
+          </a:fillRef>
+          <a:effectRef idx="2">
+            <a:schemeClr val="accent1"/>
+          </a:effectRef>
+          <a:fontRef idx="minor">
+            <a:schemeClr val="lt1"/>
+          </a:fontRef>
+        </p:style>
+        <p:txBody>
+          <a:bodyPr rtlCol="0" anchor="ctr"/>
+          <a:lstStyle/>
+          <a:p>
+            <a:pPr algn="ctr"/>
+            <a:endParaRPr/>
+          </a:p>
+        </p:txBody>
+      </p:sp>
+      <p:sp>
+        <p:nvSpPr>
+          <p:cNvPr id="40" name="Rectangle 39"/>
+          <p:cNvSpPr/>
+          <p:nvPr/>
+        </p:nvSpPr>
+        <p:spPr>
+          <a:xfrm>
+            <a:off x="8183879" y="4389120"/>
+            <a:ext cx="292608" cy="45720"/>
+          </a:xfrm>
+          <a:prstGeom prst="rect">
+            <a:avLst/>
+          </a:prstGeom>
+          <a:solidFill>
+            <a:srgbClr val="D4AF0A"/>
+          </a:solidFill>
+          <a:ln>
+            <a:noFill/>
+          </a:ln>
+          <a:effectLst/>
+        </p:spPr>
+        <p:style>
+          <a:lnRef idx="1">
+            <a:schemeClr val="accent1"/>
+          </a:lnRef>
+          <a:fillRef idx="3">
+            <a:schemeClr val="accent1"/>
+          </a:fillRef>
+          <a:effectRef idx="2">
+            <a:schemeClr val="accent1"/>
+          </a:effectRef>
+          <a:fontRef idx="minor">
+            <a:schemeClr val="lt1"/>
+          </a:fontRef>
+        </p:style>
+        <p:txBody>
+          <a:bodyPr rtlCol="0" anchor="ctr"/>
+          <a:lstStyle/>
+          <a:p>
+            <a:pPr algn="ctr"/>
+            <a:endParaRPr/>
+          </a:p>
+        </p:txBody>
+      </p:sp>
+      <p:sp>
+        <p:nvSpPr>
+          <p:cNvPr id="41" name="TextBox 40"/>
+          <p:cNvSpPr txBox="1"/>
+          <p:nvPr/>
+        </p:nvSpPr>
+        <p:spPr>
+          <a:xfrm>
+            <a:off x="8183879" y="4535424"/>
+            <a:ext cx="1325880" cy="228600"/>
+          </a:xfrm>
+          <a:prstGeom prst="rect">
+            <a:avLst/>
+          </a:prstGeom>
+          <a:noFill/>
+        </p:spPr>
+        <p:txBody>
+          <a:bodyPr wrap="square" lIns="0" tIns="0" rIns="0" bIns="0" anchor="t">
+            <a:spAutoFit/>
+          </a:bodyPr>
+          <a:lstStyle/>
+          <a:p>
+            <a:pPr algn="l"/>
+            <a:r>
+              <a:rPr sz="950" b="1" i="0" spc="150">
+                <a:solidFill>
+                  <a:srgbClr val="D4AF0A"/>
+                </a:solidFill>
+                <a:latin typeface="Segoe UI Semibold"/>
+              </a:rPr>
+              <a:t>11</a:t>
+            </a:r>
+          </a:p>
+        </p:txBody>
+      </p:sp>
+      <p:sp>
+        <p:nvSpPr>
+          <p:cNvPr id="42" name="TextBox 41"/>
+          <p:cNvSpPr txBox="1"/>
+          <p:nvPr/>
+        </p:nvSpPr>
+        <p:spPr>
+          <a:xfrm>
+            <a:off x="8183879" y="4773168"/>
+            <a:ext cx="1325880" cy="777240"/>
+          </a:xfrm>
+          <a:prstGeom prst="rect">
+            <a:avLst/>
+          </a:prstGeom>
+          <a:noFill/>
+        </p:spPr>
+        <p:txBody>
+          <a:bodyPr wrap="square" lIns="0" tIns="0" rIns="0" bIns="0" anchor="t">
+            <a:spAutoFit/>
+          </a:bodyPr>
+          <a:lstStyle/>
+          <a:p>
+            <a:pPr algn="l">
+              <a:lnSpc>
+                <a:spcPct val="105000"/>
+              </a:lnSpc>
+            </a:pPr>
+            <a:r>
+              <a:rPr sz="1200" b="1" i="0">
+                <a:solidFill>
+                  <a:srgbClr val="F3F2F1"/>
+                </a:solidFill>
+                <a:latin typeface="Segoe UI Semibold"/>
+              </a:rPr>
+              <a:t>Carrossel Power BI</a:t>
+            </a:r>
+          </a:p>
+        </p:txBody>
+      </p:sp>
+      <p:sp>
+        <p:nvSpPr>
+          <p:cNvPr id="43" name="TextBox 42"/>
+          <p:cNvSpPr txBox="1"/>
+          <p:nvPr/>
+        </p:nvSpPr>
+        <p:spPr>
+          <a:xfrm>
+            <a:off x="8183879" y="5577840"/>
+            <a:ext cx="1325880" cy="594360"/>
+          </a:xfrm>
+          <a:prstGeom prst="rect">
+            <a:avLst/>
+          </a:prstGeom>
+          <a:noFill/>
+        </p:spPr>
+        <p:txBody>
+          <a:bodyPr wrap="square" lIns="0" tIns="0" rIns="0" bIns="0" anchor="t">
+            <a:spAutoFit/>
+          </a:bodyPr>
+          <a:lstStyle/>
+          <a:p>
+            <a:pPr algn="l">
+              <a:lnSpc>
+                <a:spcPct val="115000"/>
+              </a:lnSpc>
+            </a:pPr>
+            <a:r>
+              <a:rPr sz="900" b="0" i="0">
                 <a:solidFill>
                   <a:srgbClr val="B3B0AD"/>
                 </a:solidFill>

--- a/assets/BI_Data_Generator_Apresentacao.pptx
+++ b/assets/BI_Data_Generator_Apresentacao.pptx
@@ -3755,7 +3755,7 @@
                 </a:solidFill>
                 <a:latin typeface="Segoe UI Semibold"/>
               </a:rPr>
-              <a:t>200 SETORES  ·  10.687 MEDIDAS DAX  ·  11 FERRAMENTAS</a:t>
+              <a:t>200 SETORES  ·  10.688 MEDIDAS DAX  ·  11 FERRAMENTAS</a:t>
             </a:r>
           </a:p>
         </p:txBody>
@@ -11438,7 +11438,7 @@
                 </a:solidFill>
                 <a:latin typeface="Segoe UI Semibold"/>
               </a:rPr>
-              <a:t>10.687</a:t>
+              <a:t>10.688</a:t>
             </a:r>
             <a:r>
               <a:rPr sz="4600" b="1" i="0" dirty="0">
